--- a/画图/E2E评价计费规则.pptx
+++ b/画图/E2E评价计费规则.pptx
@@ -136,6 +136,107 @@
         <a:r>
           <a:rPr lang="zh-CN" altLang="en-US"/>
           <a:t>@@e2e-accounting-rules-draft</a:t>
+        </a:r>
+      </a:p>
+    </p188:txBody>
+  </p188:cm>
+  <p188:cm id="{A812D22F-425B-4046-8F91-F16A4E8B9802}" authorId="{D3F71A66-0C34-DF1A-5236-FECDBC820DCB}" created="2026-10-22T15:53:22.981Z">
+    <pc:sldMkLst xmlns:pc="http://schemas.microsoft.com/office/powerpoint/2013/main/command">
+      <pc:docMk/>
+      <pc:sldMk cId="3759621588" sldId="256"/>
+    </pc:sldMkLst>
+    <p188:pos x="63500" y="63500"/>
+    <p188:txBody>
+      <a:bodyPr/>
+      <a:lstStyle/>
+      <a:p>
+        <a:r>
+          <a:t>PROVENANCE v1</a:t>
+        </a:r>
+      </a:p>
+      <a:p>
+        <a:r>
+          <a:t>id: e2e-accounting-rules-draft</a:t>
+        </a:r>
+      </a:p>
+      <a:p>
+        <a:r>
+          <a:t>source: 画图/画图代码/e2e/visualization/图表追溯.md</a:t>
+        </a:r>
+      </a:p>
+      <a:p>
+        <a:r>
+          <a:t/>
+        </a:r>
+      </a:p>
+      <a:p>
+        <a:r>
+          <a:t>## e2e-accounting-rules-draft｜两种评价范围的计费规则</a:t>
+        </a:r>
+      </a:p>
+      <a:p>
+        <a:r>
+          <a:t/>
+        </a:r>
+      </a:p>
+      <a:p>
+        <a:r>
+          <a:t>**共享关系与本图选择。** 本图与`@@e2e-all-find-match`、`@@e2e-small-pipeline`关联的共享代码位于 `e2e/calculate/e2e-accounting/`。两张top-k图沿同一冻结计费轨迹与reaggregate.py统计来源追溯；计费规则图展示该计费定义。完整实例完成度另按不同实例去重，不能由top-k成功率替代。 本图与`@@e2e-all-find-match`、`@@e2e-small-pipeline`关联的共享代码位于 `e2e/calculate/e2e-top-k-shared/`。两张top-k图共同读取冻结计数并复用panel等原生绘图函数；计费规则图只复用office_rgb、text_box和line等基础图形，不与曲线共同计算成功率。 本次完整入口按稳定图名 `e2e-accounting-rules-draft` 选择图或所在共享图组。</a:t>
+        </a:r>
+      </a:p>
+      <a:p>
+        <a:r>
+          <a:t/>
+        </a:r>
+      </a:p>
+      <a:p>
+        <a:r>
+          <a:t>**清空temp后的完整重建。** 从仓库根执行 `python -X utf8 -B 转换工具/ops/rebuild_figures.py --figure e2e-accounting-rules-draft`。入口顺序运行必要的数据准备、绘图／原生渲染、场景运输和PPT装配，始终屏蔽所有旧temp读取；同一次运行产生的中间文件可以继续使用。冻结实验输入与作者原生素材只从长期目录读取，图稿、命令日志、现场读取记录、`receipt.json`和含本图的`rebuilt.pptx`统一位于新建的 `temp/figure_rebuild/&lt;运行号&gt;/&lt;图名&gt;/`。正式图形不被覆盖；作者双语备注与本条来源说明写入新候选。</a:t>
+        </a:r>
+      </a:p>
+      <a:p>
+        <a:r>
+          <a:t/>
+        </a:r>
+      </a:p>
+      <a:p>
+        <a:r>
+          <a:t/>
+        </a:r>
+      </a:p>
+      <a:p>
+        <a:r>
+          <a:t>**载体与直接制图。** 当前正文Methods引用 `画图/E2E评价计费规则.pptx` 中同名页，稳定名保留历史`draft`字样，不表示当前没有被引用。`e2e/calculate/e2e-accounting/build_ppt.py::main` 用 `node`、`route` 及原生文字／直线函数生成原始规则流程；后续PPT中的作者文字、箭头和双语备注作为当前科学表述保留。本页表达判定规则，没有柱高、预测分数或个例坐标。</a:t>
+        </a:r>
+      </a:p>
+      <a:p>
+        <a:r>
+          <a:t/>
+        </a:r>
+      </a:p>
+      <a:p>
+        <a:r>
+          <a:t>**科学逻辑的实际入口。** `reaggregate.py::accounting_action` 决定小分子任务的一次候选动作；同模块 `main` 在完整冻结轨迹上赋实际计费号，保留原姿态评价。全配体任务每个候选计费一次，区域命中且身份正确记成功。小分子任务背景计费；非小分子真实目标被预测为非小分子时免费，否则计费；真实范围外小分子身份正确时免费、错误时计费；合格小分子计费，再判断身份及Build姿态阈值。图中的真实配体类别、区域命中及身份正确与否是评价时参考注释，不作为输入提供给模型。</a:t>
+        </a:r>
+      </a:p>
+      <a:p>
+        <a:r>
+          <a:t/>
+        </a:r>
+      </a:p>
+      <a:p>
+        <a:r>
+          <a:t>GT／CA2的 `evaluation.json` 保存 `accounting_rule="match-aware-stage3-v2"`、`answer_scope="all_ligand"`、完整原顺序 `traces`、`action`、`attempt_index`、预测类别、身份正确及原 `docking_stage`；`validation.json` 留档七种构造分支、免费／计费顺序、完整77-PDB分母与原指标保护核验。`source_data.csv`、`comparison.json` 与原来源副本保存重汇总前后计数，不重新运行对接。</a:t>
+        </a:r>
+      </a:p>
+      <a:p>
+        <a:r>
+          <a:t/>
+        </a:r>
+      </a:p>
+      <a:p>
+        <a:r>
+          <a:t>“+1”是计费次数增加，不是完成实例数一定增加。实例完成度在预算内按不同实例去重、可以累积多个成功；top-k success在同预算内只判PDB是否至少成功一次。当前正式PPT图注写明预算耗尽或候选用尽时停止；不能把初版草稿里“首个成功就停止”的文字套到实例完成度任务。2026-10-23已将生成器的这句旧页脚同步为预算耗尽或候选用尽，不改变任何冻结计数或正式图形。给定正确身份的Find–Build比较还有独立的范围外前景全部免费规则，见计算追溯，不由本页实际Match规则替代。</a:t>
         </a:r>
       </a:p>
     </p188:txBody>

--- a/画图/E2E评价计费规则.pptx
+++ b/画图/E2E评价计费规则.pptx
@@ -674,7 +674,7 @@
             </a:r>
             <a:r>
               <a:rPr lang="en-US" altLang="zh-CN" dirty="0"/>
-              <a:t>LigandSeek2-Find </a:t>
+              <a:t>LigandSeek-Find </a:t>
             </a:r>
             <a:r>
               <a:rPr lang="zh-CN" altLang="en-US" dirty="0"/>
@@ -753,7 +753,7 @@
             </a:r>
             <a:r>
               <a:rPr lang="en-US" altLang="zh-CN" dirty="0"/>
-              <a:t>A "+1" indicates that the charged attempt increases by one; the algorithm stops once the attempt limit is reached or no further candidates are generated by the LigandSeek2-Find. "Free skip" means skipping the current candidate without incurring an additional charge. Decision nodes involving ligand hits, ligand types and identity correctness are evaluation criteria based on the reference annotations and are not provided to the model as inputs.</a:t>
+              <a:t>A "+1" indicates that the charged attempt increases by one; the algorithm stops once the attempt limit is reached or no further candidates are generated by the LigandSeek-Find. "Free skip" means skipping the current candidate without incurring an additional charge. Decision nodes involving ligand hits, ligand types and identity correctness are evaluation criteria based on the reference annotations and are not provided to the model as inputs.</a:t>
             </a:r>
             <a:endParaRPr lang="zh-CN" altLang="en-US" dirty="0"/>
           </a:p>

--- a/画图/E2E评价计费规则.pptx
+++ b/画图/E2E评价计费规则.pptx
@@ -662,7 +662,7 @@
             </a:r>
             <a:r>
               <a:rPr lang="zh-CN" altLang="en-US" dirty="0"/>
-              <a:t>，针对符合条件小分子的配体区域检测、身份匹配及构象重建；此类小分子定义为单残基有机小分子，且无原子缺失。“</a:t>
+              <a:t>，针对合格小分子的配体区域检测、身份匹配及构象重建；此类小分子定义为单残基有机小分子，且相对于模板无原子缺失。“</a:t>
             </a:r>
             <a:r>
               <a:rPr lang="en-US" altLang="zh-CN" dirty="0"/>
@@ -741,15 +741,15 @@
             </a:r>
             <a:r>
               <a:rPr lang="zh-CN" altLang="zh-CN" dirty="0"/>
-              <a:t>, Ligand-region detection, identity matching and pose reconstruction for eligible small molecules, defined as single-residue organic small molecules with no atoms missin</a:t>
+              <a:t>, Ligand-region detection, identity matching and pose reconstruction for eligible small molecules, defined as single-residue organic small molecules with no atoms missing relative to their templates.</a:t>
             </a:r>
             <a:r>
               <a:rPr lang="en-US" altLang="zh-CN" dirty="0"/>
-              <a:t>g</a:t>
+              <a:t/>
             </a:r>
             <a:r>
               <a:rPr lang="zh-CN" altLang="zh-CN" dirty="0"/>
-              <a:t>. </a:t>
+              <a:t> </a:t>
             </a:r>
             <a:r>
               <a:rPr lang="en-US" altLang="zh-CN" dirty="0"/>
